--- a/docs/content/pivoting/pivoting_lecture.pptx
+++ b/docs/content/pivoting/pivoting_lecture.pptx
@@ -3310,7 +3310,7 @@
             </a:pPr>
             <a:r>
               <a:rPr/>
-              <a:t>Lecture 09 — Wide, Long, and Wild: Pivoting Real Data</a:t>
+              <a:t>Lecture 15 — Wide, Long, and Wild: Pivoting Real Data</a:t>
             </a:r>
           </a:p>
         </p:txBody>
@@ -3371,7 +3371,7 @@
             </a:pPr>
             <a:r>
               <a:rPr/>
-              <a:t>2026-07-05</a:t>
+              <a:t>2026-08-27</a:t>
             </a:r>
           </a:p>
         </p:txBody>
@@ -5324,7 +5324,17 @@
             </a:pPr>
             <a:r>
               <a:rPr sz="2000"/>
-              <a:t>This is the single most important reshaping skill in all of data science — almost every messy dataset needs this.</a:t>
+              <a:t>Once a dataset’s categories are trapped in column names instead of a column of values, this reshape is usually the first thing you reach for — it’s what turns a spreadsheet into something </a:t>
+            </a:r>
+            <a:r>
+              <a:rPr sz="2000">
+                <a:latin typeface="Courier"/>
+              </a:rPr>
+              <a:t>group_by()</a:t>
+            </a:r>
+            <a:r>
+              <a:rPr sz="2000"/>
+              <a:t> can work with.</a:t>
             </a:r>
           </a:p>
         </p:txBody>
@@ -6856,7 +6866,7 @@
             </a:r>
             <a:r>
               <a:rPr/>
-              <a:t> pattern from Lecture 06’s Duluth weather data</a:t>
+              <a:t> pattern from Lecture 12’s Duluth weather data</a:t>
             </a:r>
           </a:p>
           <a:p>
@@ -6960,7 +6970,7 @@
             </a:pPr>
             <a:r>
               <a:rPr/>
-              <a:t>Where We Left Off (Lecture 07)</a:t>
+              <a:t>Where We Left Off (Lecture 14)</a:t>
             </a:r>
           </a:p>
         </p:txBody>
@@ -6983,83 +6993,61 @@
             <a:pPr lvl="0"/>
             <a:r>
               <a:rPr b="1"/>
-              <a:t>Downloaded real data from inside R</a:t>
-            </a:r>
-            <a:r>
-              <a:rPr/>
-              <a:t> — NOAA’s </a:t>
-            </a:r>
-            <a:r>
-              <a:rPr>
-                <a:latin typeface="Courier"/>
-              </a:rPr>
-              <a:t>GSODR</a:t>
-            </a:r>
-            <a:r>
-              <a:rPr/>
-              <a:t> package, Duluth station</a:t>
+              <a:t>Started the final project</a:t>
+            </a:r>
+            <a:r>
+              <a:rPr/>
+              <a:t> — claimed a topic and a candidate dataset</a:t>
             </a:r>
           </a:p>
           <a:p>
             <a:pPr lvl="0"/>
             <a:r>
-              <a:rPr b="1"/>
-              <a:t>Raw vs. summarized data</a:t>
-            </a:r>
-            <a:r>
-              <a:rPr/>
-              <a:t> — daily data hides trends; </a:t>
-            </a:r>
-            <a:r>
-              <a:rPr>
-                <a:latin typeface="Courier"/>
-              </a:rPr>
-              <a:t>group_by() %&gt;% summarize()</a:t>
-            </a:r>
-            <a:r>
-              <a:rPr/>
-              <a:t> reveals them</a:t>
+              <a:rPr/>
+              <a:t>Sized up a new dataset in R with </a:t>
+            </a:r>
+            <a:r>
+              <a:rPr>
+                <a:latin typeface="Courier"/>
+              </a:rPr>
+              <a:t>read_csv()</a:t>
+            </a:r>
+            <a:r>
+              <a:rPr/>
+              <a:t>, </a:t>
+            </a:r>
+            <a:r>
+              <a:rPr>
+                <a:latin typeface="Courier"/>
+              </a:rPr>
+              <a:t>glimpse()</a:t>
+            </a:r>
+            <a:r>
+              <a:rPr/>
+              <a:t>, </a:t>
+            </a:r>
+            <a:r>
+              <a:rPr>
+                <a:latin typeface="Courier"/>
+              </a:rPr>
+              <a:t>dim()</a:t>
+            </a:r>
+            <a:r>
+              <a:rPr/>
+              <a:t>, </a:t>
+            </a:r>
+            <a:r>
+              <a:rPr>
+                <a:latin typeface="Courier"/>
+              </a:rPr>
+              <a:t>head()</a:t>
             </a:r>
           </a:p>
           <a:p>
             <a:pPr lvl="0"/>
             <a:r>
-              <a:rPr b="1"/>
-              <a:t>Reused </a:t>
-            </a:r>
-            <a:r>
-              <a:rPr b="1">
-                <a:latin typeface="Courier"/>
-              </a:rPr>
-              <a:t>lm()</a:t>
-            </a:r>
-            <a:r>
-              <a:rPr/>
-              <a:t> to estimate a rate of change — °C per year, converted to °C per decade</a:t>
-            </a:r>
-          </a:p>
-          <a:p>
-            <a:pPr lvl="0"/>
-            <a:r>
-              <a:rPr b="1">
-                <a:latin typeface="Courier"/>
-              </a:rPr>
-              <a:t>case_when()</a:t>
-            </a:r>
-            <a:r>
-              <a:rPr/>
-              <a:t> to build a new categorical variable — summer vs. winter</a:t>
-            </a:r>
-          </a:p>
-          <a:p>
-            <a:pPr lvl="0"/>
-            <a:r>
-              <a:rPr b="1"/>
-              <a:t>Compared two group-specific models</a:t>
-            </a:r>
-            <a:r>
-              <a:rPr/>
-              <a:t> — found winter warming faster than summer</a:t>
+              <a:rPr/>
+              <a:t>Wrote H₀ and Hₐ for a question you chose yourself</a:t>
             </a:r>
           </a:p>
           <a:p>
@@ -7084,18 +7072,15 @@
             <a:pPr lvl="0"/>
             <a:r>
               <a:rPr sz="2000"/>
-              <a:t>Duluth’s weather data came to us </a:t>
+              <a:t>Every dataset we’ve analyzed so far came to us </a:t>
             </a:r>
             <a:r>
               <a:rPr sz="2000" b="1"/>
               <a:t>already tidy</a:t>
             </a:r>
-          </a:p>
-          <a:p>
-            <a:pPr lvl="1"/>
             <a:r>
               <a:rPr sz="2000"/>
-              <a:t>one row per day, one column per variable.</a:t>
+              <a:t> — one row per observation, one column per variable.</a:t>
             </a:r>
           </a:p>
           <a:p>
@@ -7781,7 +7766,7 @@
             </a:pPr>
             <a:r>
               <a:rPr sz="2000" b="1"/>
-              <a:t>You will use </a:t>
+              <a:t>Expect to reach for </a:t>
             </a:r>
             <a:r>
               <a:rPr sz="2000" b="1">
@@ -7791,11 +7776,11 @@
             </a:r>
             <a:r>
               <a:rPr sz="2000" b="1"/>
-              <a:t> constantly in your own research.</a:t>
+              <a:t> again in your own research.</a:t>
             </a:r>
             <a:r>
               <a:rPr sz="2000"/>
-              <a:t> This is one of the most-used functions in the entire tidyverse.</a:t>
+              <a:t> Government text files, field data sheets, and Excel exports are so often shaped one-column-per-year or one-column-per-site that this pivot comes up in almost any real dataset you didn’t design yourself.</a:t>
             </a:r>
           </a:p>
         </p:txBody>
@@ -11984,7 +11969,7 @@
             </a:r>
             <a:r>
               <a:rPr b="1"/>
-              <a:t> syntax as Lecture 06</a:t>
+              <a:t> syntax as Lecture 11/13</a:t>
             </a:r>
             <a:r>
               <a:rPr/>
@@ -12015,7 +12000,7 @@
             <a:pPr lvl="0"/>
             <a:r>
               <a:rPr/>
-              <a:t>The slope tells us °C-equivalent: percentage points of max ice cover, per year</a:t>
+              <a:t>The slope tells us how many percentage points of max ice cover change per year</a:t>
             </a:r>
           </a:p>
           <a:p>
@@ -12328,7 +12313,7 @@
             </a:r>
             <a:r>
               <a:rPr/>
-              <a:t> workflow from Lecture 06 applies to </a:t>
+              <a:t> workflow from Lecture 12 applies to </a:t>
             </a:r>
             <a:r>
               <a:rPr i="1"/>
@@ -12715,42 +12700,92 @@
           <a:p>
             <a:pPr lvl="0"/>
             <a:r>
-              <a:rPr sz="2000" b="1"/>
-              <a:t>Predicting first</a:t>
-            </a:r>
-            <a:r>
               <a:rPr sz="2000"/>
-              <a:t> forces your brain to </a:t>
-            </a:r>
-            <a:r>
-              <a:rPr sz="2000" i="1"/>
-              <a:t>retrieve</a:t>
+              <a:t>Guessing the shape of </a:t>
+            </a:r>
+            <a:r>
+              <a:rPr sz="2000">
+                <a:latin typeface="Courier"/>
+              </a:rPr>
+              <a:t>ice_long</a:t>
             </a:r>
             <a:r>
               <a:rPr sz="2000"/>
-              <a:t> what it knows — the gap between guess and answer is what makes it stick.</a:t>
+              <a:t> before you pivot forces you to reason about what </a:t>
+            </a:r>
+            <a:r>
+              <a:rPr sz="2000">
+                <a:latin typeface="Courier"/>
+              </a:rPr>
+              <a:t>pivot_longer()</a:t>
+            </a:r>
+            <a:r>
+              <a:rPr sz="2000"/>
+              <a:t> actually does, instead of just watching it happen.</a:t>
             </a:r>
           </a:p>
           <a:p>
             <a:pPr lvl="0"/>
             <a:r>
-              <a:rPr sz="2000" b="1"/>
-              <a:t>Typing by hand</a:t>
-            </a:r>
-            <a:r>
               <a:rPr sz="2000"/>
-              <a:t> builds the finger-memory and error-spotting that copy-paste skips.</a:t>
+              <a:t>Typing </a:t>
+            </a:r>
+            <a:r>
+              <a:rPr sz="2000">
+                <a:latin typeface="Courier"/>
+              </a:rPr>
+              <a:t>names_prefix</a:t>
+            </a:r>
+            <a:r>
+              <a:rPr sz="2000"/>
+              <a:t>, </a:t>
+            </a:r>
+            <a:r>
+              <a:rPr sz="2000">
+                <a:latin typeface="Courier"/>
+              </a:rPr>
+              <a:t>names_to</a:t>
+            </a:r>
+            <a:r>
+              <a:rPr sz="2000"/>
+              <a:t>, and </a:t>
+            </a:r>
+            <a:r>
+              <a:rPr sz="2000">
+                <a:latin typeface="Courier"/>
+              </a:rPr>
+              <a:t>values_to</a:t>
+            </a:r>
+            <a:r>
+              <a:rPr sz="2000"/>
+              <a:t> yourself is how you notice which argument does which job — copy-pasting lets you skip right past that.</a:t>
             </a:r>
           </a:p>
           <a:p>
             <a:pPr lvl="0"/>
             <a:r>
-              <a:rPr sz="2000" b="1"/>
-              <a:t>Chunk → immediate practice</a:t>
-            </a:r>
-            <a:r>
               <a:rPr sz="2000"/>
-              <a:t> keeps a new idea in working memory long enough to form a lasting schema.</a:t>
+              <a:t>Reshaping wrong in front of an error message (a missing </a:t>
+            </a:r>
+            <a:r>
+              <a:rPr sz="2000">
+                <a:latin typeface="Courier"/>
+              </a:rPr>
+              <a:t>date</a:t>
+            </a:r>
+            <a:r>
+              <a:rPr sz="2000"/>
+              <a:t> column, a stray </a:t>
+            </a:r>
+            <a:r>
+              <a:rPr sz="2000">
+                <a:latin typeface="Courier"/>
+              </a:rPr>
+              <a:t>X</a:t>
+            </a:r>
+            <a:r>
+              <a:rPr sz="2000"/>
+              <a:t>) teaches you more about tidy data than reshaping right on the first try.</a:t>
             </a:r>
           </a:p>
         </p:txBody>

--- a/docs/content/pivoting/pivoting_lecture.pptx
+++ b/docs/content/pivoting/pivoting_lecture.pptx
@@ -12502,7 +12502,7 @@
             </a:pPr>
             <a:r>
               <a:rPr b="1"/>
-              <a:t>Up next — Homework:</a:t>
+              <a:t>Up next — Extension (out of class):</a:t>
             </a:r>
           </a:p>
           <a:p>
@@ -12516,7 +12516,7 @@
             <a:pPr lvl="0"/>
             <a:r>
               <a:rPr/>
-              <a:t>Compare your lake’s maximum ice trend to Lake Superior’s</a:t>
+              <a:t>Compare your lake’s maximum ice trend to Lake Superior’s, predicting first by hand</a:t>
             </a:r>
           </a:p>
         </p:txBody>

--- a/docs/content/pivoting/pivoting_lecture.pptx
+++ b/docs/content/pivoting/pivoting_lecture.pptx
@@ -3371,7 +3371,7 @@
             </a:pPr>
             <a:r>
               <a:rPr/>
-              <a:t>2026-08-27</a:t>
+              <a:t>2026-09-01</a:t>
             </a:r>
           </a:p>
         </p:txBody>

--- a/docs/content/pivoting/pivoting_lecture.pptx
+++ b/docs/content/pivoting/pivoting_lecture.pptx
@@ -3371,7 +3371,7 @@
             </a:pPr>
             <a:r>
               <a:rPr/>
-              <a:t>2026-09-01</a:t>
+              <a:t>2026-09-03</a:t>
             </a:r>
           </a:p>
         </p:txBody>

--- a/docs/content/pivoting/pivoting_lecture.pptx
+++ b/docs/content/pivoting/pivoting_lecture.pptx
@@ -3371,7 +3371,7 @@
             </a:pPr>
             <a:r>
               <a:rPr/>
-              <a:t>2026-09-03</a:t>
+              <a:t>2026-09-04</a:t>
             </a:r>
           </a:p>
         </p:txBody>
